--- a/waw-decks/Madd-Waw-Small-Quranic.pptx
+++ b/waw-decks/Madd-Waw-Small-Quranic.pptx
@@ -4,6 +4,9 @@
   <p:sldMasterIdLst>
     <p:sldMasterId id="2147483648" r:id="rId1"/>
   </p:sldMasterIdLst>
+  <p:notesMasterIdLst>
+    <p:notesMasterId r:id="rId14"/>
+  </p:notesMasterIdLst>
   <p:sldIdLst>
     <p:sldId id="256" r:id="rId2"/>
     <p:sldId id="257" r:id="rId3"/>
@@ -18,9 +21,6 @@
     <p:sldId id="266" r:id="rId12"/>
     <p:sldId id="267" r:id="rId13"/>
   </p:sldIdLst>
-  <p:notesMasterIdLst>
-    <p:notesMasterId r:id="rId14"/>
-  </p:notesMasterIdLst>
   <p:sldSz cx="9144000" cy="5143500"/>
   <p:notesSz cx="5143500" cy="9144000"/>
   <p:defaultTextStyle>
@@ -2786,9 +2786,6 @@
               </a:rPr>
               <a:t>لَهُ</a:t>
             </a:r>
-            <a:pPr algn="ctr" indent="0" marL="0">
-              <a:buNone/>
-            </a:pPr>
             <a:r>
               <a:rPr lang="ar-SA" altLang="en-US" sz="16875" dirty="0">
                 <a:solidFill>
@@ -4360,9 +4357,6 @@
               </a:rPr>
               <a:t>فَضۡلَهُ</a:t>
             </a:r>
-            <a:pPr algn="ctr" indent="0" marL="0">
-              <a:buNone/>
-            </a:pPr>
             <a:r>
               <a:rPr lang="ar-SA" altLang="en-US" sz="11625" dirty="0">
                 <a:solidFill>
@@ -6096,9 +6090,6 @@
               </a:rPr>
               <a:t>قَلۡبُهُ</a:t>
             </a:r>
-            <a:pPr algn="ctr" indent="0" marL="0">
-              <a:buNone/>
-            </a:pPr>
             <a:r>
               <a:rPr lang="ar-SA" altLang="en-US" sz="11625" dirty="0">
                 <a:solidFill>
@@ -7832,9 +7823,6 @@
               </a:rPr>
               <a:t>عِنۡدَهُ</a:t>
             </a:r>
-            <a:pPr algn="ctr" indent="0" marL="0">
-              <a:buNone/>
-            </a:pPr>
             <a:r>
               <a:rPr lang="ar-SA" altLang="en-US" sz="11625" dirty="0">
                 <a:solidFill>
@@ -9568,9 +9556,6 @@
               </a:rPr>
               <a:t>مَعَهُ</a:t>
             </a:r>
-            <a:pPr algn="ctr" indent="0" marL="0">
-              <a:buNone/>
-            </a:pPr>
             <a:r>
               <a:rPr lang="ar-SA" altLang="en-US" sz="11625" dirty="0">
                 <a:solidFill>
@@ -11304,9 +11289,6 @@
               </a:rPr>
               <a:t>إِنَّهُ</a:t>
             </a:r>
-            <a:pPr algn="ctr" indent="0" marL="0">
-              <a:buNone/>
-            </a:pPr>
             <a:r>
               <a:rPr lang="ar-SA" altLang="en-US" sz="11625" dirty="0">
                 <a:solidFill>
@@ -13040,9 +13022,6 @@
               </a:rPr>
               <a:t>أَنَّهُ</a:t>
             </a:r>
-            <a:pPr algn="ctr" indent="0" marL="0">
-              <a:buNone/>
-            </a:pPr>
             <a:r>
               <a:rPr lang="ar-SA" altLang="en-US" sz="11625" dirty="0">
                 <a:solidFill>
@@ -14776,9 +14755,6 @@
               </a:rPr>
               <a:t>رَبَّهُ</a:t>
             </a:r>
-            <a:pPr algn="ctr" indent="0" marL="0">
-              <a:buNone/>
-            </a:pPr>
             <a:r>
               <a:rPr lang="ar-SA" altLang="en-US" sz="11625" dirty="0">
                 <a:solidFill>
@@ -16512,9 +16488,6 @@
               </a:rPr>
               <a:t>نَفۡسَهُ</a:t>
             </a:r>
-            <a:pPr algn="ctr" indent="0" marL="0">
-              <a:buNone/>
-            </a:pPr>
             <a:r>
               <a:rPr lang="ar-SA" altLang="en-US" sz="11625" dirty="0">
                 <a:solidFill>
@@ -18248,9 +18221,6 @@
               </a:rPr>
               <a:t>عَبۡدَهُ</a:t>
             </a:r>
-            <a:pPr algn="ctr" indent="0" marL="0">
-              <a:buNone/>
-            </a:pPr>
             <a:r>
               <a:rPr lang="ar-SA" altLang="en-US" sz="11625" dirty="0">
                 <a:solidFill>
@@ -19984,9 +19954,6 @@
               </a:rPr>
               <a:t>رِزۡقَهُ</a:t>
             </a:r>
-            <a:pPr algn="ctr" indent="0" marL="0">
-              <a:buNone/>
-            </a:pPr>
             <a:r>
               <a:rPr lang="ar-SA" altLang="en-US" sz="11625" dirty="0">
                 <a:solidFill>
@@ -21720,9 +21687,6 @@
               </a:rPr>
               <a:t>وَجۡهَهُ</a:t>
             </a:r>
-            <a:pPr algn="ctr" indent="0" marL="0">
-              <a:buNone/>
-            </a:pPr>
             <a:r>
               <a:rPr lang="ar-SA" altLang="en-US" sz="11625" dirty="0">
                 <a:solidFill>
